--- a/curso_es/pptx/S61.pptx
+++ b/curso_es/pptx/S61.pptx
@@ -3800,7 +3800,7 @@
                 </a:solidFill>
                 <a:latin typeface="Nunito Sans"/>
               </a:rPr>
-              <a:t>Iker: «Los deberes ayudan a repasar. ¿Tú por qué piensas que no?». Naiara: «En casa no tengo tiempo ni un sitio tranquilo». Iker: «Vale. ¿Y si fueran voluntarios?».</a:t>
+              <a:t>Un chico: «Los deberes ayudan a repasar. ¿Tú por qué piensas que no?». Una chica: «En casa no tengo tiempo ni un sitio tranquilo». El chico: «Vale. ¿Y si fueran voluntarios?».</a:t>
             </a:r>
           </a:p>
         </p:txBody>
@@ -3873,7 +3873,7 @@
                 </a:solidFill>
                 <a:latin typeface="Nunito Sans"/>
               </a:rPr>
-              <a:t>¿Se escuchan? Sí: Iker pregunta por la razón de Naiara y la tiene en cuenta.</a:t>
+              <a:t>¿Se escuchan? Sí: el chico pregunta por la razón de la chica y la tiene en cuenta.</a:t>
             </a:r>
           </a:p>
           <a:p>
@@ -4109,7 +4109,7 @@
                 </a:solidFill>
                 <a:latin typeface="Nunito Sans"/>
               </a:rPr>
-              <a:t>Omar: «Quedamos en el Arenal». Maialen: «Mejor en Moyúa». Omar: «Que no, en el Arenal». Maialen: «Moyúa, y punto». Así, cuarenta mensajes.</a:t>
+              <a:t>Un chico: «Quedamos en el Arenal». Una chica: «Mejor en Moyúa». El chico: «Que no, en el Arenal». La chica: «Moyúa, y punto». Así, cuarenta mensajes.</a:t>
             </a:r>
           </a:p>
         </p:txBody>
@@ -4418,7 +4418,7 @@
                 </a:solidFill>
                 <a:latin typeface="Nunito Sans"/>
               </a:rPr>
-              <a:t>Yasmin y Dylan hablan del uniforme escolar. Se escuchan, dan razones y descubren cosas nuevas. Al final siguen sin estar de acuerdo.</a:t>
+              <a:t>Una chica y un chico hablan del uniforme escolar. Se escuchan, dan razones y descubren cosas nuevas. Al final siguen sin estar de acuerdo.</a:t>
             </a:r>
           </a:p>
         </p:txBody>
@@ -7243,7 +7243,7 @@
                           </a:solidFill>
                           <a:latin typeface="Nunito Sans"/>
                         </a:rPr>
-                        <a:t>«¡Eres un vago!» «¡Y tú un pelota!»</a:t>
+                        <a:t>«¡Eres un vago!» «¡Y tú un plasta!»</a:t>
                       </a:r>
                     </a:p>
                   </a:txBody>
